--- a/B2B_PL_test_panelu_FY26_2_slajdy.pptx
+++ b/B2B_PL_test_panelu_FY26_2_slajdy.pptx
@@ -503,7 +503,7 @@
           <a:p>
             <a:r>
               <a:rPr lang="en-US" dirty="0"/>
-              <a:t>Test panelu trwał od 19 marca. Klienci przyjęli kanał: 174 kont, 127 z zamówieniem, 396,8 tys. € sprzedaży, przed planem do dziś. 59% klientów wraca z drugim zamówieniem w ciągu 60 dni. Technicznie panel działał: rejestracja, rabaty, ceny netto, terminy płatności. Od przypisania klientów do KAM 12 czerwca przybyło 83 zamówień i 61,2 tys. €.</a:t>
+              <a:t>Test panelu trwał od 19 marca. Klienci przyjęli kanał: 174 kont, 127 z zamówieniem, 422,4 tys. € sprzedaży, 91% budżetu rocznego (94% planu do dziś). 59% klientów wraca z drugim zamówieniem w ciągu 60 dni. Technicznie panel działał: rejestracja, rabaty, ceny netto, terminy płatności. Od przypisania klientów do KAM 12 czerwca przybyło 83 zamówień i 61,2 tys. €.</a:t>
             </a:r>
             <a:endParaRPr lang="en-US" dirty="0"/>
           </a:p>
@@ -591,7 +591,7 @@
           <a:p>
             <a:r>
               <a:rPr lang="en-US" dirty="0"/>
-              <a:t>Liczba zamówień to główna luka: 308 wobec 928 w planie. Trzy przyczyny: po pierwsze nie było procesu sprzedaży wokół panelu, KAM nie mieli ustalonego sposobu pracy ani narzędzi. Po drugie nie było procesu pozyskania nowych klientów, bez kampanii i budżetu baza rosła tylko z portfeli PH. Po trzecie polityka cenowa nie była gotowa: większość zamówień to deale spoza cennika, korygowane ręcznie w Sage, a klient widział w panelu inne kwoty niż na fakturze. Na FY27: proces sprzedaży, proces pozyskania, jeden cennik w panelu i program partnerski.</a:t>
+              <a:t>Liczba zamówień to główna luka: 317 wobec 928 w planie. Trzy przyczyny: po pierwsze nie było procesu sprzedaży wokół panelu, KAM nie mieli ustalonego sposobu pracy ani narzędzi. Po drugie nie było procesu pozyskania nowych klientów, bez kampanii i budżetu baza rosła tylko z portfeli PH. Po trzecie polityka cenowa nie była gotowa: większość zamówień to deale spoza cennika, korygowane ręcznie w Sage, a klient widział w panelu inne kwoty niż na fakturze. Na FY27: proces sprzedaży, proces pozyskania, jeden cennik w panelu i program partnerski.</a:t>
             </a:r>
             <a:endParaRPr lang="en-US" dirty="0"/>
           </a:p>
@@ -1036,7 +1036,7 @@
                 <a:ea typeface="Calibri" pitchFamily="34" charset="-122"/>
                 <a:cs typeface="Calibri" pitchFamily="34" charset="-120"/>
               </a:rPr>
-              <a:t>Panel sbm-partners.com, pierwsze zamówienie 19.03.2026 · wyniki narastająco na 25.08.2026</a:t>
+              <a:t>Panel sbm-partners.com, pierwsze zamówienie 19.03.2026 · wyniki narastająco na 25.09.2026</a:t>
             </a:r>
             <a:endParaRPr lang="en-US" sz="1400" dirty="0"/>
           </a:p>
@@ -1306,7 +1306,7 @@
                 <a:ea typeface="Calibri" pitchFamily="34" charset="-122"/>
                 <a:cs typeface="Calibri" pitchFamily="34" charset="-120"/>
               </a:rPr>
-              <a:t>396,8 tys. €</a:t>
+              <a:t>422,4 tys. €</a:t>
             </a:r>
             <a:endParaRPr lang="en-US" sz="3000" dirty="0"/>
           </a:p>
@@ -1345,7 +1345,7 @@
                 <a:ea typeface="Calibri" pitchFamily="34" charset="-122"/>
                 <a:cs typeface="Calibri" pitchFamily="34" charset="-120"/>
               </a:rPr>
-              <a:t>sprzedaży netto = 86% budżetu, 105% planu do dziś</a:t>
+              <a:t>sprzedaży netto = 91% budżetu, 94% planu do dziś</a:t>
             </a:r>
             <a:endParaRPr lang="en-US" sz="1200" dirty="0"/>
           </a:p>
@@ -2042,7 +2042,7 @@
                 <a:ea typeface="Calibri" pitchFamily="34" charset="-122"/>
                 <a:cs typeface="Calibri" pitchFamily="34" charset="-120"/>
               </a:rPr>
-              <a:t>Sprzedaż przed planem do dziś (105%) mimo słabego sezonu</a:t>
+              <a:t>91% budżetu rocznego na tydzień przed końcem BC</a:t>
             </a:r>
             <a:endParaRPr lang="en-US" sz="1400" dirty="0"/>
           </a:p>
@@ -2159,7 +2159,7 @@
                 <a:ea typeface="Calibri" pitchFamily="34" charset="-122"/>
                 <a:cs typeface="Calibri" pitchFamily="34" charset="-120"/>
               </a:rPr>
-              <a:t>Dane: raport KPI B2B z 25.08.2026 (Sage ZORDDET, WEB-B2B). Powroty: Sage ZORDDET 16.03–22.07.2026. Przyrost KAM: zakładka „Śledzenie”.</a:t>
+              <a:t>Dane: raport KPI B2B z 25.08.2026 (Sage ZORDDET, WEB-B2B) + nowe zamówienia z panelu 26.08–25.09.2026. Powroty: Sage ZORDDET 16.03–22.07.2026. Przyrost KAM: zakładka „Śledzenie”.</a:t>
             </a:r>
             <a:endParaRPr lang="en-US" sz="1000" dirty="0"/>
           </a:p>
@@ -2269,7 +2269,7 @@
                 <a:ea typeface="Calibri" pitchFamily="34" charset="-122"/>
                 <a:cs typeface="Calibri" pitchFamily="34" charset="-120"/>
               </a:rPr>
-              <a:t>308 zamówień = 33% celu (928): klienci zamawiają rzadko, dużo i na żądanie, średnio 1 288 € zamiast 500 €</a:t>
+              <a:t>317 zamówień = 34% celu (928): klienci zamawiają rzadko, dużo i na żądanie, średnio 1 333 € zamiast 500 €</a:t>
             </a:r>
             <a:endParaRPr lang="en-US" sz="1400" dirty="0"/>
           </a:p>
@@ -3501,7 +3501,7 @@
                 <a:ea typeface="Calibri" pitchFamily="34" charset="-122"/>
                 <a:cs typeface="Calibri" pitchFamily="34" charset="-120"/>
               </a:rPr>
-              <a:t>Dane: raport KPI B2B z 25.08.2026 (Sage ZORDDET, WEB-B2B); podsumowanie testu panelu B2B, lipiec 2026.</a:t>
+              <a:t>Dane: raport KPI B2B z 25.08.2026 (Sage ZORDDET, WEB-B2B) + nowe zamówienia z panelu 26.08–25.09.2026; podsumowanie testu panelu B2B, lipiec 2026.</a:t>
             </a:r>
             <a:endParaRPr lang="en-US" sz="1000" dirty="0"/>
           </a:p>
